--- a/stage4_genai/01_how_llms_work/Lecture-14-How-LLMs-Work.pptx
+++ b/stage4_genai/01_how_llms_work/Lecture-14-How-LLMs-Work.pptx
@@ -8309,6 +8309,9 @@
           <a:lstStyle/>
           <a:p>
             <a:r>
+              <a:rPr>
+                <a:latin typeface="Calibri"/>
+              </a:rPr>
               <a:t>AI Basic Training</a:t>
             </a:r>
           </a:p>
@@ -8330,6 +8333,9 @@
           <a:lstStyle/>
           <a:p>
             <a:r>
+              <a:rPr>
+                <a:latin typeface="Calibri"/>
+              </a:rPr>
               <a:t>Lesson 4.1  |  Stage 4: Generative AI</a:t>
             </a:r>
           </a:p>
@@ -8351,6 +8357,9 @@
           <a:lstStyle/>
           <a:p>
             <a:r>
+              <a:rPr b="1">
+                <a:latin typeface="Calibri"/>
+              </a:rPr>
               <a:t>How LLMs Work</a:t>
             </a:r>
           </a:p>
@@ -8372,6 +8381,9 @@
           <a:lstStyle/>
           <a:p>
             <a:r>
+              <a:rPr>
+                <a:latin typeface="Calibri"/>
+              </a:rPr>
               <a:t>Tokens, Embeddings, and Next-Token Prediction</a:t>
             </a:r>
           </a:p>
@@ -8411,6 +8423,9 @@
           <a:lstStyle/>
           <a:p>
             <a:r>
+              <a:rPr b="1">
+                <a:latin typeface="Calibri"/>
+              </a:rPr>
               <a:t>Attention: Which Tokens Matter to Which?</a:t>
             </a:r>
           </a:p>
@@ -8474,11 +8489,17 @@
           <a:lstStyle/>
           <a:p>
             <a:r>
+              <a:rPr b="1">
+                <a:latin typeface="Calibri"/>
+              </a:rPr>
               <a:t>Classic ML</a:t>
             </a:r>
           </a:p>
           <a:p>
             <a:r>
+              <a:rPr b="1">
+                <a:latin typeface="Calibri"/>
+              </a:rPr>
               <a:t>vs LLMs</a:t>
             </a:r>
           </a:p>
@@ -8500,6 +8521,9 @@
           <a:lstStyle/>
           <a:p>
             <a:r>
+              <a:rPr b="1">
+                <a:latin typeface="Calibri"/>
+              </a:rPr>
               <a:t>04</a:t>
             </a:r>
           </a:p>
@@ -8539,6 +8563,9 @@
           <a:lstStyle/>
           <a:p>
             <a:r>
+              <a:rPr b="1">
+                <a:latin typeface="Calibri"/>
+              </a:rPr>
               <a:t>The Paradigm Shift</a:t>
             </a:r>
           </a:p>
@@ -8602,11 +8629,17 @@
           <a:lstStyle/>
           <a:p>
             <a:r>
+              <a:rPr b="1">
+                <a:latin typeface="Calibri"/>
+              </a:rPr>
               <a:t>Workshop</a:t>
             </a:r>
           </a:p>
           <a:p>
             <a:r>
+              <a:rPr b="1">
+                <a:latin typeface="Calibri"/>
+              </a:rPr>
               <a:t>and Next Steps</a:t>
             </a:r>
           </a:p>
@@ -8628,6 +8661,9 @@
           <a:lstStyle/>
           <a:p>
             <a:r>
+              <a:rPr b="1">
+                <a:latin typeface="Calibri"/>
+              </a:rPr>
               <a:t>05</a:t>
             </a:r>
           </a:p>
@@ -8667,6 +8703,9 @@
           <a:lstStyle/>
           <a:p>
             <a:r>
+              <a:rPr b="1">
+                <a:latin typeface="Calibri"/>
+              </a:rPr>
               <a:t>Workshop: 3 Hands-On Exercises</a:t>
             </a:r>
           </a:p>
@@ -8688,37 +8727,49 @@
           <a:lstStyle/>
           <a:p>
             <a:r>
-              <a:rPr sz="1600"/>
+              <a:rPr sz="1600">
+                <a:latin typeface="Calibri"/>
+              </a:rPr>
               <a:t>Exercise 1:  Tokenisation - text to tokens to IDs, vocabulary, OOV</a:t>
             </a:r>
           </a:p>
           <a:p>
             <a:r>
-              <a:rPr sz="1600"/>
+              <a:rPr sz="1600">
+                <a:latin typeface="Calibri"/>
+              </a:rPr>
               <a:t>Exercise 2:  Embeddings - tokens to vectors, cosine similarity, semantic distance</a:t>
             </a:r>
           </a:p>
           <a:p>
             <a:r>
-              <a:rPr sz="1600"/>
+              <a:rPr sz="1600">
+                <a:latin typeface="Calibri"/>
+              </a:rPr>
               <a:t>Exercise 3:  Attention - weight matrices, which words attend to which</a:t>
             </a:r>
           </a:p>
           <a:p>
             <a:r>
-              <a:rPr sz="1600"/>
+              <a:rPr sz="1600">
+                <a:latin typeface="Calibri"/>
+              </a:rPr>
               <a:t/>
             </a:r>
           </a:p>
           <a:p>
             <a:r>
-              <a:rPr sz="1600"/>
+              <a:rPr sz="1600">
+                <a:latin typeface="Calibri"/>
+              </a:rPr>
               <a:t>No GPU or API key required - all exercises run on NumPy alone</a:t>
             </a:r>
           </a:p>
           <a:p>
             <a:r>
-              <a:rPr sz="1600"/>
+              <a:rPr sz="1600">
+                <a:latin typeface="Calibri"/>
+              </a:rPr>
               <a:t>The goal is intuition, not production code</a:t>
             </a:r>
           </a:p>
@@ -8758,37 +8809,49 @@
           <a:lstStyle/>
           <a:p>
             <a:r>
-              <a:rPr sz="1500"/>
+              <a:rPr sz="1500">
+                <a:latin typeface="Calibri"/>
+              </a:rPr>
               <a:t>LLMs predict the next token - everything else emerges from this</a:t>
             </a:r>
           </a:p>
           <a:p>
             <a:r>
-              <a:rPr sz="1500"/>
+              <a:rPr sz="1500">
+                <a:latin typeface="Calibri"/>
+              </a:rPr>
               <a:t>Tokens are roughly words; rare terms get split into subwords</a:t>
             </a:r>
           </a:p>
           <a:p>
             <a:r>
-              <a:rPr sz="1500"/>
+              <a:rPr sz="1500">
+                <a:latin typeface="Calibri"/>
+              </a:rPr>
               <a:t>Embeddings map tokens to vectors - similar meaning = similar vectors</a:t>
             </a:r>
           </a:p>
           <a:p>
             <a:r>
-              <a:rPr sz="1500"/>
+              <a:rPr sz="1500">
+                <a:latin typeface="Calibri"/>
+              </a:rPr>
               <a:t>Attention lets the model focus on relevant tokens across the input</a:t>
             </a:r>
           </a:p>
           <a:p>
             <a:r>
-              <a:rPr sz="1500"/>
+              <a:rPr sz="1500">
+                <a:latin typeface="Calibri"/>
+              </a:rPr>
               <a:t>LLMs are pre-trained on trillions of tokens - you use them, not train them</a:t>
             </a:r>
           </a:p>
           <a:p>
             <a:r>
-              <a:rPr sz="1500"/>
+              <a:rPr sz="1500">
+                <a:latin typeface="Calibri"/>
+              </a:rPr>
               <a:t>Next: HuggingFace - use pre-trained models with zero training</a:t>
             </a:r>
           </a:p>
@@ -8810,11 +8873,17 @@
           <a:lstStyle/>
           <a:p>
             <a:r>
+              <a:rPr b="1">
+                <a:latin typeface="Calibri"/>
+              </a:rPr>
               <a:t>Key</a:t>
             </a:r>
           </a:p>
           <a:p>
             <a:r>
+              <a:rPr b="1">
+                <a:latin typeface="Calibri"/>
+              </a:rPr>
               <a:t>Takeaways</a:t>
             </a:r>
           </a:p>
@@ -8854,6 +8923,9 @@
           <a:lstStyle/>
           <a:p>
             <a:r>
+              <a:rPr>
+                <a:latin typeface="Calibri"/>
+              </a:rPr>
               <a:t>Next:  Lesson 4.2 - HuggingFace Pre-trained Models</a:t>
             </a:r>
           </a:p>
@@ -8875,6 +8947,9 @@
           <a:lstStyle/>
           <a:p>
             <a:r>
+              <a:rPr b="1">
+                <a:latin typeface="Calibri"/>
+              </a:rPr>
               <a:t>How LLMs Work</a:t>
             </a:r>
           </a:p>
@@ -8914,31 +8989,41 @@
           <a:lstStyle/>
           <a:p>
             <a:r>
-              <a:rPr sz="1600"/>
+              <a:rPr sz="1600">
+                <a:latin typeface="Calibri"/>
+              </a:rPr>
               <a:t>The core idea: next-token prediction</a:t>
             </a:r>
           </a:p>
           <a:p>
             <a:r>
-              <a:rPr sz="1600"/>
+              <a:rPr sz="1600">
+                <a:latin typeface="Calibri"/>
+              </a:rPr>
               <a:t>Tokens - how text becomes model input</a:t>
             </a:r>
           </a:p>
           <a:p>
             <a:r>
-              <a:rPr sz="1600"/>
+              <a:rPr sz="1600">
+                <a:latin typeface="Calibri"/>
+              </a:rPr>
               <a:t>Embeddings - meaning as vectors</a:t>
             </a:r>
           </a:p>
           <a:p>
             <a:r>
-              <a:rPr sz="1600"/>
+              <a:rPr sz="1600">
+                <a:latin typeface="Calibri"/>
+              </a:rPr>
               <a:t>Attention - which tokens matter to which</a:t>
             </a:r>
           </a:p>
           <a:p>
             <a:r>
-              <a:rPr sz="1600"/>
+              <a:rPr sz="1600">
+                <a:latin typeface="Calibri"/>
+              </a:rPr>
               <a:t>Classic ML vs LLMs - the paradigm shift</a:t>
             </a:r>
           </a:p>
@@ -8960,6 +9045,9 @@
           <a:lstStyle/>
           <a:p>
             <a:r>
+              <a:rPr b="1">
+                <a:latin typeface="Calibri"/>
+              </a:rPr>
               <a:t>What We'll Cover</a:t>
             </a:r>
           </a:p>
@@ -8999,11 +9087,17 @@
           <a:lstStyle/>
           <a:p>
             <a:r>
+              <a:rPr b="1">
+                <a:latin typeface="Calibri"/>
+              </a:rPr>
               <a:t>Next-Token</a:t>
             </a:r>
           </a:p>
           <a:p>
             <a:r>
+              <a:rPr b="1">
+                <a:latin typeface="Calibri"/>
+              </a:rPr>
               <a:t>Prediction</a:t>
             </a:r>
           </a:p>
@@ -9025,6 +9119,9 @@
           <a:lstStyle/>
           <a:p>
             <a:r>
+              <a:rPr b="1">
+                <a:latin typeface="Calibri"/>
+              </a:rPr>
               <a:t>01</a:t>
             </a:r>
           </a:p>
@@ -9064,6 +9161,9 @@
           <a:lstStyle/>
           <a:p>
             <a:r>
+              <a:rPr b="1">
+                <a:latin typeface="Calibri"/>
+              </a:rPr>
               <a:t>An LLM Is a Next-Token Predictor</a:t>
             </a:r>
           </a:p>
@@ -9127,6 +9227,9 @@
           <a:lstStyle/>
           <a:p>
             <a:r>
+              <a:rPr>
+                <a:latin typeface="Calibri"/>
+              </a:rPr>
               <a:t/>
             </a:r>
           </a:p>
@@ -9148,37 +9251,49 @@
           <a:lstStyle/>
           <a:p>
             <a:r>
-              <a:rPr sz="1400"/>
+              <a:rPr sz="1400">
+                <a:latin typeface="Calibri"/>
+              </a:rPr>
               <a:t>That's all it's doing.</a:t>
             </a:r>
           </a:p>
           <a:p>
             <a:r>
-              <a:rPr sz="1400"/>
+              <a:rPr sz="1400">
+                <a:latin typeface="Calibri"/>
+              </a:rPr>
               <a:t/>
             </a:r>
           </a:p>
           <a:p>
             <a:r>
-              <a:rPr sz="1400"/>
+              <a:rPr sz="1400">
+                <a:latin typeface="Calibri"/>
+              </a:rPr>
               <a:t>Everything impressive about</a:t>
             </a:r>
           </a:p>
           <a:p>
             <a:r>
-              <a:rPr sz="1400"/>
+              <a:rPr sz="1400">
+                <a:latin typeface="Calibri"/>
+              </a:rPr>
               <a:t>ChatGPT and Claude comes</a:t>
             </a:r>
           </a:p>
           <a:p>
             <a:r>
-              <a:rPr sz="1400"/>
+              <a:rPr sz="1400">
+                <a:latin typeface="Calibri"/>
+              </a:rPr>
               <a:t>from predicting the</a:t>
             </a:r>
           </a:p>
           <a:p>
             <a:r>
-              <a:rPr sz="1400"/>
+              <a:rPr sz="1400">
+                <a:latin typeface="Calibri"/>
+              </a:rPr>
               <a:t>next token.</a:t>
             </a:r>
           </a:p>
@@ -9200,6 +9315,9 @@
           <a:lstStyle/>
           <a:p>
             <a:r>
+              <a:rPr b="1">
+                <a:latin typeface="Calibri"/>
+              </a:rPr>
               <a:t>Everything Emerges from This</a:t>
             </a:r>
           </a:p>
@@ -9221,43 +9339,57 @@
           <a:lstStyle/>
           <a:p>
             <a:r>
-              <a:rPr sz="1400"/>
+              <a:rPr sz="1400">
+                <a:latin typeface="Calibri"/>
+              </a:rPr>
               <a:t>The model predicts one token at a time</a:t>
             </a:r>
           </a:p>
           <a:p>
             <a:r>
-              <a:rPr sz="1400"/>
+              <a:rPr sz="1400">
+                <a:latin typeface="Calibri"/>
+              </a:rPr>
               <a:t>  Then feeds its output back as input</a:t>
             </a:r>
           </a:p>
           <a:p>
             <a:r>
-              <a:rPr sz="1400"/>
+              <a:rPr sz="1400">
+                <a:latin typeface="Calibri"/>
+              </a:rPr>
               <a:t>  And repeats</a:t>
             </a:r>
           </a:p>
           <a:p>
             <a:r>
-              <a:rPr sz="1400"/>
+              <a:rPr sz="1400">
+                <a:latin typeface="Calibri"/>
+              </a:rPr>
               <a:t/>
             </a:r>
           </a:p>
           <a:p>
             <a:r>
-              <a:rPr sz="1400"/>
+              <a:rPr sz="1400">
+                <a:latin typeface="Calibri"/>
+              </a:rPr>
               <a:t>Reasoning, coding, summarisation -</a:t>
             </a:r>
           </a:p>
           <a:p>
             <a:r>
-              <a:rPr sz="1400"/>
+              <a:rPr sz="1400">
+                <a:latin typeface="Calibri"/>
+              </a:rPr>
               <a:t>all emerge from next-token prediction</a:t>
             </a:r>
           </a:p>
           <a:p>
             <a:r>
-              <a:rPr sz="1400"/>
+              <a:rPr sz="1400">
+                <a:latin typeface="Calibri"/>
+              </a:rPr>
               <a:t>trained on trillions of tokens</a:t>
             </a:r>
           </a:p>
@@ -9297,11 +9429,17 @@
           <a:lstStyle/>
           <a:p>
             <a:r>
+              <a:rPr b="1">
+                <a:latin typeface="Calibri"/>
+              </a:rPr>
               <a:t>Tokens and</a:t>
             </a:r>
           </a:p>
           <a:p>
             <a:r>
+              <a:rPr b="1">
+                <a:latin typeface="Calibri"/>
+              </a:rPr>
               <a:t>Embeddings</a:t>
             </a:r>
           </a:p>
@@ -9323,6 +9461,9 @@
           <a:lstStyle/>
           <a:p>
             <a:r>
+              <a:rPr b="1">
+                <a:latin typeface="Calibri"/>
+              </a:rPr>
               <a:t>02</a:t>
             </a:r>
           </a:p>
@@ -9362,6 +9503,9 @@
           <a:lstStyle/>
           <a:p>
             <a:r>
+              <a:rPr b="1">
+                <a:latin typeface="Calibri"/>
+              </a:rPr>
               <a:t>Tokens: How Text Becomes Model Input</a:t>
             </a:r>
           </a:p>
@@ -9383,43 +9527,57 @@
           <a:lstStyle/>
           <a:p>
             <a:r>
-              <a:rPr sz="1400"/>
+              <a:rPr sz="1400">
+                <a:latin typeface="Calibri"/>
+              </a:rPr>
               <a:t>Roughly 1 token = 1 word:</a:t>
             </a:r>
           </a:p>
           <a:p>
             <a:r>
-              <a:rPr sz="1400"/>
+              <a:rPr sz="1400">
+                <a:latin typeface="Calibri"/>
+              </a:rPr>
               <a:t>  "the" = 1 token</a:t>
             </a:r>
           </a:p>
           <a:p>
             <a:r>
-              <a:rPr sz="1400"/>
+              <a:rPr sz="1400">
+                <a:latin typeface="Calibri"/>
+              </a:rPr>
               <a:t>  "attack" = 1 token</a:t>
             </a:r>
           </a:p>
           <a:p>
             <a:r>
-              <a:rPr sz="1400"/>
+              <a:rPr sz="1400">
+                <a:latin typeface="Calibri"/>
+              </a:rPr>
               <a:t/>
             </a:r>
           </a:p>
           <a:p>
             <a:r>
-              <a:rPr sz="1400"/>
+              <a:rPr sz="1400">
+                <a:latin typeface="Calibri"/>
+              </a:rPr>
               <a:t>Subwords for rare terms:</a:t>
             </a:r>
           </a:p>
           <a:p>
             <a:r>
-              <a:rPr sz="1400"/>
+              <a:rPr sz="1400">
+                <a:latin typeface="Calibri"/>
+              </a:rPr>
               <a:t>  "injection" = "inject" + "ion"</a:t>
             </a:r>
           </a:p>
           <a:p>
             <a:r>
-              <a:rPr sz="1400"/>
+              <a:rPr sz="1400">
+                <a:latin typeface="Calibri"/>
+              </a:rPr>
               <a:t>  "CVE-2024-1234" = 5 tokens</a:t>
             </a:r>
           </a:p>
@@ -9441,49 +9599,65 @@
           <a:lstStyle/>
           <a:p>
             <a:r>
-              <a:rPr sz="1400"/>
+              <a:rPr sz="1400">
+                <a:latin typeface="Calibri"/>
+              </a:rPr>
               <a:t>Why tokens matter:</a:t>
             </a:r>
           </a:p>
           <a:p>
             <a:r>
-              <a:rPr sz="1400"/>
+              <a:rPr sz="1400">
+                <a:latin typeface="Calibri"/>
+              </a:rPr>
               <a:t/>
             </a:r>
           </a:p>
           <a:p>
             <a:r>
-              <a:rPr sz="1400"/>
+              <a:rPr sz="1400">
+                <a:latin typeface="Calibri"/>
+              </a:rPr>
               <a:t>API pricing is per-token</a:t>
             </a:r>
           </a:p>
           <a:p>
             <a:r>
-              <a:rPr sz="1400"/>
+              <a:rPr sz="1400">
+                <a:latin typeface="Calibri"/>
+              </a:rPr>
               <a:t/>
             </a:r>
           </a:p>
           <a:p>
             <a:r>
-              <a:rPr sz="1400"/>
+              <a:rPr sz="1400">
+                <a:latin typeface="Calibri"/>
+              </a:rPr>
               <a:t>Context windows measured in tokens</a:t>
             </a:r>
           </a:p>
           <a:p>
             <a:r>
-              <a:rPr sz="1400"/>
+              <a:rPr sz="1400">
+                <a:latin typeface="Calibri"/>
+              </a:rPr>
               <a:t>  (Claude: 200,000 tokens)</a:t>
             </a:r>
           </a:p>
           <a:p>
             <a:r>
-              <a:rPr sz="1400"/>
+              <a:rPr sz="1400">
+                <a:latin typeface="Calibri"/>
+              </a:rPr>
               <a:t/>
             </a:r>
           </a:p>
           <a:p>
             <a:r>
-              <a:rPr sz="1400"/>
+              <a:rPr sz="1400">
+                <a:latin typeface="Calibri"/>
+              </a:rPr>
               <a:t>Long documents need chunking</a:t>
             </a:r>
           </a:p>
@@ -9523,6 +9697,9 @@
           <a:lstStyle/>
           <a:p>
             <a:r>
+              <a:rPr b="1">
+                <a:latin typeface="Calibri"/>
+              </a:rPr>
               <a:t>Embeddings: Meaning as Vectors</a:t>
             </a:r>
           </a:p>
@@ -9586,11 +9763,17 @@
           <a:lstStyle/>
           <a:p>
             <a:r>
+              <a:rPr b="1">
+                <a:latin typeface="Calibri"/>
+              </a:rPr>
               <a:t>The Attention</a:t>
             </a:r>
           </a:p>
           <a:p>
             <a:r>
+              <a:rPr b="1">
+                <a:latin typeface="Calibri"/>
+              </a:rPr>
               <a:t>Mechanism</a:t>
             </a:r>
           </a:p>
@@ -9612,6 +9795,9 @@
           <a:lstStyle/>
           <a:p>
             <a:r>
+              <a:rPr b="1">
+                <a:latin typeface="Calibri"/>
+              </a:rPr>
               <a:t>03</a:t>
             </a:r>
           </a:p>
